--- a/my-brain/Лекция GS/Сборка Angular приложения.pptx
+++ b/my-brain/Лекция GS/Сборка Angular приложения.pptx
@@ -3085,6 +3085,19 @@
               </a:rPr>
               <a:t>Angular</a:t>
             </a:r>
+            <a:r>
+              <a:rPr lang="ru-RU" sz="5400" b="1" dirty="0">
+                <a:solidFill>
+                  <a:schemeClr val="tx2">
+                    <a:lumMod val="50000"/>
+                  </a:schemeClr>
+                </a:solidFill>
+                <a:latin typeface="Roboto Black" panose="02000000000000000000" pitchFamily="2" charset="0"/>
+                <a:ea typeface="Roboto Black" panose="02000000000000000000" pitchFamily="2" charset="0"/>
+                <a:cs typeface="Roboto Black" panose="02000000000000000000" pitchFamily="2" charset="0"/>
+              </a:rPr>
+              <a:t/>
+            </a:r>
             <a:br>
               <a:rPr lang="ru-RU" sz="5400" b="1" dirty="0">
                 <a:solidFill>
@@ -3153,6 +3166,13 @@
   <p:clrMapOvr>
     <a:masterClrMapping/>
   </p:clrMapOvr>
+  <p:timing>
+    <p:tnLst>
+      <p:par>
+        <p:cTn id="1" dur="indefinite" restart="never" nodeType="tmRoot"/>
+      </p:par>
+    </p:tnLst>
+  </p:timing>
 </p:sld>
 </file>
 
@@ -4439,6 +4459,13 @@
   <p:clrMapOvr>
     <a:masterClrMapping/>
   </p:clrMapOvr>
+  <p:timing>
+    <p:tnLst>
+      <p:par>
+        <p:cTn id="1" dur="indefinite" restart="never" nodeType="tmRoot"/>
+      </p:par>
+    </p:tnLst>
+  </p:timing>
 </p:sld>
 </file>
 
@@ -5153,6 +5180,13 @@
   <p:clrMapOvr>
     <a:masterClrMapping/>
   </p:clrMapOvr>
+  <p:timing>
+    <p:tnLst>
+      <p:par>
+        <p:cTn id="1" dur="indefinite" restart="never" nodeType="tmRoot"/>
+      </p:par>
+    </p:tnLst>
+  </p:timing>
 </p:sld>
 </file>
 
@@ -6262,6 +6296,330 @@
   <p:clrMapOvr>
     <a:masterClrMapping/>
   </p:clrMapOvr>
+  <p:timing>
+    <p:tnLst>
+      <p:par>
+        <p:cTn id="1" dur="indefinite" restart="never" nodeType="tmRoot">
+          <p:childTnLst>
+            <p:seq concurrent="1" nextAc="seek">
+              <p:cTn id="2" dur="indefinite" nodeType="mainSeq">
+                <p:childTnLst>
+                  <p:par>
+                    <p:cTn id="3" fill="hold">
+                      <p:stCondLst>
+                        <p:cond delay="indefinite"/>
+                      </p:stCondLst>
+                      <p:childTnLst>
+                        <p:par>
+                          <p:cTn id="4" fill="hold">
+                            <p:stCondLst>
+                              <p:cond delay="0"/>
+                            </p:stCondLst>
+                            <p:childTnLst>
+                              <p:par>
+                                <p:cTn id="5" presetID="1" presetClass="entr" presetSubtype="0" fill="hold" grpId="0" nodeType="clickEffect">
+                                  <p:stCondLst>
+                                    <p:cond delay="0"/>
+                                  </p:stCondLst>
+                                  <p:childTnLst>
+                                    <p:set>
+                                      <p:cBhvr>
+                                        <p:cTn id="6" dur="1" fill="hold">
+                                          <p:stCondLst>
+                                            <p:cond delay="0"/>
+                                          </p:stCondLst>
+                                        </p:cTn>
+                                        <p:tgtEl>
+                                          <p:spTgt spid="11"/>
+                                        </p:tgtEl>
+                                        <p:attrNameLst>
+                                          <p:attrName>style.visibility</p:attrName>
+                                        </p:attrNameLst>
+                                      </p:cBhvr>
+                                      <p:to>
+                                        <p:strVal val="visible"/>
+                                      </p:to>
+                                    </p:set>
+                                  </p:childTnLst>
+                                </p:cTn>
+                              </p:par>
+                              <p:par>
+                                <p:cTn id="7" presetID="1" presetClass="entr" presetSubtype="0" fill="hold" nodeType="withEffect">
+                                  <p:stCondLst>
+                                    <p:cond delay="0"/>
+                                  </p:stCondLst>
+                                  <p:childTnLst>
+                                    <p:set>
+                                      <p:cBhvr>
+                                        <p:cTn id="8" dur="1" fill="hold">
+                                          <p:stCondLst>
+                                            <p:cond delay="0"/>
+                                          </p:stCondLst>
+                                        </p:cTn>
+                                        <p:tgtEl>
+                                          <p:spTgt spid="12"/>
+                                        </p:tgtEl>
+                                        <p:attrNameLst>
+                                          <p:attrName>style.visibility</p:attrName>
+                                        </p:attrNameLst>
+                                      </p:cBhvr>
+                                      <p:to>
+                                        <p:strVal val="visible"/>
+                                      </p:to>
+                                    </p:set>
+                                  </p:childTnLst>
+                                </p:cTn>
+                              </p:par>
+                            </p:childTnLst>
+                          </p:cTn>
+                        </p:par>
+                      </p:childTnLst>
+                    </p:cTn>
+                  </p:par>
+                  <p:par>
+                    <p:cTn id="9" fill="hold">
+                      <p:stCondLst>
+                        <p:cond delay="indefinite"/>
+                      </p:stCondLst>
+                      <p:childTnLst>
+                        <p:par>
+                          <p:cTn id="10" fill="hold">
+                            <p:stCondLst>
+                              <p:cond delay="0"/>
+                            </p:stCondLst>
+                            <p:childTnLst>
+                              <p:par>
+                                <p:cTn id="11" presetID="1" presetClass="entr" presetSubtype="0" fill="hold" grpId="0" nodeType="clickEffect">
+                                  <p:stCondLst>
+                                    <p:cond delay="0"/>
+                                  </p:stCondLst>
+                                  <p:childTnLst>
+                                    <p:set>
+                                      <p:cBhvr>
+                                        <p:cTn id="12" dur="1" fill="hold">
+                                          <p:stCondLst>
+                                            <p:cond delay="0"/>
+                                          </p:stCondLst>
+                                        </p:cTn>
+                                        <p:tgtEl>
+                                          <p:spTgt spid="13"/>
+                                        </p:tgtEl>
+                                        <p:attrNameLst>
+                                          <p:attrName>style.visibility</p:attrName>
+                                        </p:attrNameLst>
+                                      </p:cBhvr>
+                                      <p:to>
+                                        <p:strVal val="visible"/>
+                                      </p:to>
+                                    </p:set>
+                                  </p:childTnLst>
+                                </p:cTn>
+                              </p:par>
+                              <p:par>
+                                <p:cTn id="13" presetID="1" presetClass="entr" presetSubtype="0" fill="hold" nodeType="withEffect">
+                                  <p:stCondLst>
+                                    <p:cond delay="0"/>
+                                  </p:stCondLst>
+                                  <p:childTnLst>
+                                    <p:set>
+                                      <p:cBhvr>
+                                        <p:cTn id="14" dur="1" fill="hold">
+                                          <p:stCondLst>
+                                            <p:cond delay="0"/>
+                                          </p:stCondLst>
+                                        </p:cTn>
+                                        <p:tgtEl>
+                                          <p:spTgt spid="17"/>
+                                        </p:tgtEl>
+                                        <p:attrNameLst>
+                                          <p:attrName>style.visibility</p:attrName>
+                                        </p:attrNameLst>
+                                      </p:cBhvr>
+                                      <p:to>
+                                        <p:strVal val="visible"/>
+                                      </p:to>
+                                    </p:set>
+                                  </p:childTnLst>
+                                </p:cTn>
+                              </p:par>
+                            </p:childTnLst>
+                          </p:cTn>
+                        </p:par>
+                      </p:childTnLst>
+                    </p:cTn>
+                  </p:par>
+                  <p:par>
+                    <p:cTn id="15" fill="hold">
+                      <p:stCondLst>
+                        <p:cond delay="indefinite"/>
+                      </p:stCondLst>
+                      <p:childTnLst>
+                        <p:par>
+                          <p:cTn id="16" fill="hold">
+                            <p:stCondLst>
+                              <p:cond delay="0"/>
+                            </p:stCondLst>
+                            <p:childTnLst>
+                              <p:par>
+                                <p:cTn id="17" presetID="1" presetClass="entr" presetSubtype="0" fill="hold" grpId="0" nodeType="clickEffect">
+                                  <p:stCondLst>
+                                    <p:cond delay="0"/>
+                                  </p:stCondLst>
+                                  <p:childTnLst>
+                                    <p:set>
+                                      <p:cBhvr>
+                                        <p:cTn id="18" dur="1" fill="hold">
+                                          <p:stCondLst>
+                                            <p:cond delay="0"/>
+                                          </p:stCondLst>
+                                        </p:cTn>
+                                        <p:tgtEl>
+                                          <p:spTgt spid="14"/>
+                                        </p:tgtEl>
+                                        <p:attrNameLst>
+                                          <p:attrName>style.visibility</p:attrName>
+                                        </p:attrNameLst>
+                                      </p:cBhvr>
+                                      <p:to>
+                                        <p:strVal val="visible"/>
+                                      </p:to>
+                                    </p:set>
+                                  </p:childTnLst>
+                                </p:cTn>
+                              </p:par>
+                              <p:par>
+                                <p:cTn id="19" presetID="1" presetClass="entr" presetSubtype="0" fill="hold" nodeType="withEffect">
+                                  <p:stCondLst>
+                                    <p:cond delay="0"/>
+                                  </p:stCondLst>
+                                  <p:childTnLst>
+                                    <p:set>
+                                      <p:cBhvr>
+                                        <p:cTn id="20" dur="1" fill="hold">
+                                          <p:stCondLst>
+                                            <p:cond delay="0"/>
+                                          </p:stCondLst>
+                                        </p:cTn>
+                                        <p:tgtEl>
+                                          <p:spTgt spid="16"/>
+                                        </p:tgtEl>
+                                        <p:attrNameLst>
+                                          <p:attrName>style.visibility</p:attrName>
+                                        </p:attrNameLst>
+                                      </p:cBhvr>
+                                      <p:to>
+                                        <p:strVal val="visible"/>
+                                      </p:to>
+                                    </p:set>
+                                  </p:childTnLst>
+                                </p:cTn>
+                              </p:par>
+                            </p:childTnLst>
+                          </p:cTn>
+                        </p:par>
+                      </p:childTnLst>
+                    </p:cTn>
+                  </p:par>
+                  <p:par>
+                    <p:cTn id="21" fill="hold">
+                      <p:stCondLst>
+                        <p:cond delay="indefinite"/>
+                      </p:stCondLst>
+                      <p:childTnLst>
+                        <p:par>
+                          <p:cTn id="22" fill="hold">
+                            <p:stCondLst>
+                              <p:cond delay="0"/>
+                            </p:stCondLst>
+                            <p:childTnLst>
+                              <p:par>
+                                <p:cTn id="23" presetID="1" presetClass="entr" presetSubtype="0" fill="hold" grpId="0" nodeType="clickEffect">
+                                  <p:stCondLst>
+                                    <p:cond delay="0"/>
+                                  </p:stCondLst>
+                                  <p:childTnLst>
+                                    <p:set>
+                                      <p:cBhvr>
+                                        <p:cTn id="24" dur="1" fill="hold">
+                                          <p:stCondLst>
+                                            <p:cond delay="0"/>
+                                          </p:stCondLst>
+                                        </p:cTn>
+                                        <p:tgtEl>
+                                          <p:spTgt spid="15"/>
+                                        </p:tgtEl>
+                                        <p:attrNameLst>
+                                          <p:attrName>style.visibility</p:attrName>
+                                        </p:attrNameLst>
+                                      </p:cBhvr>
+                                      <p:to>
+                                        <p:strVal val="visible"/>
+                                      </p:to>
+                                    </p:set>
+                                  </p:childTnLst>
+                                </p:cTn>
+                              </p:par>
+                              <p:par>
+                                <p:cTn id="25" presetID="1" presetClass="entr" presetSubtype="0" fill="hold" nodeType="withEffect">
+                                  <p:stCondLst>
+                                    <p:cond delay="0"/>
+                                  </p:stCondLst>
+                                  <p:childTnLst>
+                                    <p:set>
+                                      <p:cBhvr>
+                                        <p:cTn id="26" dur="1" fill="hold">
+                                          <p:stCondLst>
+                                            <p:cond delay="0"/>
+                                          </p:stCondLst>
+                                        </p:cTn>
+                                        <p:tgtEl>
+                                          <p:spTgt spid="19"/>
+                                        </p:tgtEl>
+                                        <p:attrNameLst>
+                                          <p:attrName>style.visibility</p:attrName>
+                                        </p:attrNameLst>
+                                      </p:cBhvr>
+                                      <p:to>
+                                        <p:strVal val="visible"/>
+                                      </p:to>
+                                    </p:set>
+                                  </p:childTnLst>
+                                </p:cTn>
+                              </p:par>
+                            </p:childTnLst>
+                          </p:cTn>
+                        </p:par>
+                      </p:childTnLst>
+                    </p:cTn>
+                  </p:par>
+                </p:childTnLst>
+              </p:cTn>
+              <p:prevCondLst>
+                <p:cond evt="onPrev" delay="0">
+                  <p:tgtEl>
+                    <p:sldTgt/>
+                  </p:tgtEl>
+                </p:cond>
+              </p:prevCondLst>
+              <p:nextCondLst>
+                <p:cond evt="onNext" delay="0">
+                  <p:tgtEl>
+                    <p:sldTgt/>
+                  </p:tgtEl>
+                </p:cond>
+              </p:nextCondLst>
+            </p:seq>
+          </p:childTnLst>
+        </p:cTn>
+      </p:par>
+    </p:tnLst>
+    <p:bldLst>
+      <p:bldP spid="11" grpId="0"/>
+      <p:bldP spid="13" grpId="0"/>
+      <p:bldP spid="14" grpId="0"/>
+      <p:bldP spid="15" grpId="0"/>
+    </p:bldLst>
+  </p:timing>
 </p:sld>
 </file>
 
@@ -7150,6 +7508,13 @@
   <p:clrMapOvr>
     <a:masterClrMapping/>
   </p:clrMapOvr>
+  <p:timing>
+    <p:tnLst>
+      <p:par>
+        <p:cTn id="1" dur="indefinite" restart="never" nodeType="tmRoot"/>
+      </p:par>
+    </p:tnLst>
+  </p:timing>
 </p:sld>
 </file>
 
@@ -7675,6 +8040,13 @@
   <p:clrMapOvr>
     <a:masterClrMapping/>
   </p:clrMapOvr>
+  <p:timing>
+    <p:tnLst>
+      <p:par>
+        <p:cTn id="1" dur="indefinite" restart="never" nodeType="tmRoot"/>
+      </p:par>
+    </p:tnLst>
+  </p:timing>
 </p:sld>
 </file>
 
@@ -8795,6 +9167,13 @@
   <p:clrMapOvr>
     <a:masterClrMapping/>
   </p:clrMapOvr>
+  <p:timing>
+    <p:tnLst>
+      <p:par>
+        <p:cTn id="1" dur="indefinite" restart="never" nodeType="tmRoot"/>
+      </p:par>
+    </p:tnLst>
+  </p:timing>
 </p:sld>
 </file>
 
@@ -9193,6 +9572,14 @@
                 <a:cs typeface="Roboto" panose="02000000000000000000" pitchFamily="2" charset="0"/>
               </a:rPr>
             </a:br>
+            <a:r>
+              <a:rPr lang="en-US" dirty="0">
+                <a:latin typeface="Roboto" panose="02000000000000000000" pitchFamily="2" charset="0"/>
+                <a:ea typeface="Roboto" panose="02000000000000000000" pitchFamily="2" charset="0"/>
+                <a:cs typeface="Roboto" panose="02000000000000000000" pitchFamily="2" charset="0"/>
+              </a:rPr>
+              <a:t/>
+            </a:r>
             <a:br>
               <a:rPr lang="en-US" dirty="0">
                 <a:latin typeface="Roboto" panose="02000000000000000000" pitchFamily="2" charset="0"/>
@@ -10467,6 +10854,13 @@
   <p:clrMapOvr>
     <a:masterClrMapping/>
   </p:clrMapOvr>
+  <p:timing>
+    <p:tnLst>
+      <p:par>
+        <p:cTn id="1" dur="indefinite" restart="never" nodeType="tmRoot"/>
+      </p:par>
+    </p:tnLst>
+  </p:timing>
 </p:sld>
 </file>
 
